--- a/presentacion/Claude_Code_Presentacion.pptx
+++ b/presentacion/Claude_Code_Presentacion.pptx
@@ -46850,52 +46850,7 @@
                 </a:solidFill>
                 <a:latin typeface="Segoe UI"/>
               </a:rPr>
-              <a:t>Un </a:t>
-            </a:r>
-            <a:r>
-              <a:rPr sz="3000" b="1" dirty="0" err="1">
-                <a:solidFill>
-                  <a:srgbClr val="E8EAED"/>
-                </a:solidFill>
-                <a:latin typeface="Segoe UI"/>
-              </a:rPr>
-              <a:t>ejemplo</a:t>
-            </a:r>
-            <a:r>
-              <a:rPr sz="3000" b="1" dirty="0">
-                <a:solidFill>
-                  <a:srgbClr val="E8EAED"/>
-                </a:solidFill>
-                <a:latin typeface="Segoe UI"/>
-              </a:rPr>
-              <a:t> real, </a:t>
-            </a:r>
-            <a:r>
-              <a:rPr lang="en-GB" sz="3000" b="1" dirty="0" err="1">
-                <a:solidFill>
-                  <a:srgbClr val="E8EAED"/>
-                </a:solidFill>
-                <a:latin typeface="Segoe UI"/>
-              </a:rPr>
-              <a:t>Arquitectura</a:t>
-            </a:r>
-            <a:r>
-              <a:rPr lang="en-GB" sz="3000" b="1" dirty="0">
-                <a:solidFill>
-                  <a:srgbClr val="E8EAED"/>
-                </a:solidFill>
-                <a:latin typeface="Segoe UI"/>
-              </a:rPr>
-              <a:t> </a:t>
-            </a:r>
-            <a:r>
-              <a:rPr lang="en-GB" sz="3000" b="1" dirty="0" err="1">
-                <a:solidFill>
-                  <a:srgbClr val="E8EAED"/>
-                </a:solidFill>
-                <a:latin typeface="Segoe UI"/>
-              </a:rPr>
-              <a:t>Aplicacion</a:t>
+              <a:t>Un ejemplo real: arquitectura de la aplicación</a:t>
             </a:r>
             <a:endParaRPr sz="3000" b="1" dirty="0">
               <a:solidFill>

--- a/presentacion/Claude_Code_Presentacion.pptx
+++ b/presentacion/Claude_Code_Presentacion.pptx
@@ -36431,7 +36431,7 @@
                 </a:solidFill>
                 <a:latin typeface="Segoe UI"/>
               </a:rPr>
-              <a:t>→ reconstruir en local, o UN solo publisher</a:t>
+              <a:t>→ UN solo publisher. "Derivado" es del fichero, no de la carpeta</a:t>
             </a:r>
           </a:p>
         </p:txBody>
@@ -41566,7 +41566,7 @@
                 </a:solidFill>
                 <a:latin typeface="Segoe UI"/>
               </a:rPr>
-              <a:t>Recall en zonas densas · EXTRACTED = fiable, INFERRED = pista · interno (data/) · derivado: nunca viaja, se reconstruye</a:t>
+              <a:t>Recall en zonas densas · EXTRACTED = fiable, INFERRED = pista · interno (data/) · derivado se reconstruye, pero lo escrito a mano viaja</a:t>
             </a:r>
           </a:p>
         </p:txBody>

--- a/presentacion/Claude_Code_Presentacion.pptx
+++ b/presentacion/Claude_Code_Presentacion.pptx
@@ -36191,7 +36191,7 @@
                 </a:solidFill>
                 <a:latin typeface="Segoe UI"/>
               </a:rPr>
-              <a:t>Versionado del bucket = red de recuperación</a:t>
+              <a:t>Versionado = 30 días, no merge · protege pull Y push</a:t>
             </a:r>
           </a:p>
         </p:txBody>
